--- a/IT(DP).pptx
+++ b/IT(DP).pptx
@@ -207,18 +207,6 @@
     </a:lvl9pPr>
   </p:defaultTextStyle>
 </p:presentation>
-</file>
-
-<file path=ppt/revisionInfo.xml><?xml version="1.0" encoding="utf-8"?>
-<p1510:revInfo xmlns:a="http://schemas.openxmlformats.org/drawingml/2006/main" xmlns:r="http://schemas.openxmlformats.org/officeDocument/2006/relationships" xmlns:p1510="http://schemas.microsoft.com/office/powerpoint/2015/10/main">
-  <p1510:revLst>
-    <p1510:client id="{48058CD5-E06E-4CFA-8995-8FE19704575D}" v="406" dt="2026-05-12T16:46:10.424"/>
-    <p1510:client id="{5CFCB743-E1D0-4436-99F6-502293814E46}" v="228" dt="2026-05-11T15:39:37.420"/>
-    <p1510:client id="{6D686742-5B83-4F57-9F6B-F08F56E9E6B9}" v="376" dt="2026-05-11T21:23:36.117"/>
-    <p1510:client id="{9B6050EF-570D-470E-A0D2-5E626C8699B6}" v="96" dt="2026-05-12T06:27:16.441"/>
-    <p1510:client id="{A02E70AD-FE09-4EAE-8AA7-94404D8A9B40}" v="801" dt="2026-05-11T09:42:46.868"/>
-  </p1510:revLst>
-</p1510:revInfo>
 </file>
 
 <file path=ppt/slideLayouts/slideLayout1.xml><?xml version="1.0" encoding="utf-8"?>
@@ -722,7 +710,7 @@
             <a:fld id="{B61BEF0D-F0BB-DE4B-95CE-6DB70DBA9567}" type="datetimeFigureOut">
               <a:rPr lang="en-US" dirty="0"/>
               <a:pPr/>
-              <a:t>5/12/2026</a:t>
+              <a:t>5/14/2026</a:t>
             </a:fld>
             <a:endParaRPr lang="en-US"/>
           </a:p>
@@ -1015,7 +1003,7 @@
             <a:fld id="{B61BEF0D-F0BB-DE4B-95CE-6DB70DBA9567}" type="datetimeFigureOut">
               <a:rPr lang="en-US" dirty="0"/>
               <a:pPr/>
-              <a:t>5/12/2026</a:t>
+              <a:t>5/14/2026</a:t>
             </a:fld>
             <a:endParaRPr lang="en-US"/>
           </a:p>
@@ -1264,7 +1252,7 @@
             <a:fld id="{B61BEF0D-F0BB-DE4B-95CE-6DB70DBA9567}" type="datetimeFigureOut">
               <a:rPr lang="en-US" dirty="0"/>
               <a:pPr/>
-              <a:t>5/12/2026</a:t>
+              <a:t>5/14/2026</a:t>
             </a:fld>
             <a:endParaRPr lang="en-US"/>
           </a:p>
@@ -1805,7 +1793,7 @@
             <a:fld id="{B61BEF0D-F0BB-DE4B-95CE-6DB70DBA9567}" type="datetimeFigureOut">
               <a:rPr lang="en-US" dirty="0"/>
               <a:pPr/>
-              <a:t>5/12/2026</a:t>
+              <a:t>5/14/2026</a:t>
             </a:fld>
             <a:endParaRPr lang="en-US"/>
           </a:p>
@@ -2054,7 +2042,7 @@
             <a:fld id="{B61BEF0D-F0BB-DE4B-95CE-6DB70DBA9567}" type="datetimeFigureOut">
               <a:rPr lang="en-US" dirty="0"/>
               <a:pPr/>
-              <a:t>5/12/2026</a:t>
+              <a:t>5/14/2026</a:t>
             </a:fld>
             <a:endParaRPr lang="en-US"/>
           </a:p>
@@ -2587,7 +2575,7 @@
             <a:fld id="{B61BEF0D-F0BB-DE4B-95CE-6DB70DBA9567}" type="datetimeFigureOut">
               <a:rPr lang="en-US" dirty="0"/>
               <a:pPr/>
-              <a:t>5/12/2026</a:t>
+              <a:t>5/14/2026</a:t>
             </a:fld>
             <a:endParaRPr lang="en-US"/>
           </a:p>
@@ -2885,7 +2873,7 @@
             <a:fld id="{B61BEF0D-F0BB-DE4B-95CE-6DB70DBA9567}" type="datetimeFigureOut">
               <a:rPr lang="en-US" dirty="0"/>
               <a:pPr/>
-              <a:t>5/12/2026</a:t>
+              <a:t>5/14/2026</a:t>
             </a:fld>
             <a:endParaRPr lang="en-US"/>
           </a:p>
@@ -3059,7 +3047,7 @@
             <a:fld id="{B61BEF0D-F0BB-DE4B-95CE-6DB70DBA9567}" type="datetimeFigureOut">
               <a:rPr lang="en-US" dirty="0"/>
               <a:pPr/>
-              <a:t>5/12/2026</a:t>
+              <a:t>5/14/2026</a:t>
             </a:fld>
             <a:endParaRPr lang="en-US"/>
           </a:p>
@@ -3239,7 +3227,7 @@
             <a:fld id="{B61BEF0D-F0BB-DE4B-95CE-6DB70DBA9567}" type="datetimeFigureOut">
               <a:rPr lang="en-US" dirty="0"/>
               <a:pPr/>
-              <a:t>5/12/2026</a:t>
+              <a:t>5/14/2026</a:t>
             </a:fld>
             <a:endParaRPr lang="en-US"/>
           </a:p>
@@ -3409,7 +3397,7 @@
             <a:fld id="{B61BEF0D-F0BB-DE4B-95CE-6DB70DBA9567}" type="datetimeFigureOut">
               <a:rPr lang="en-US" dirty="0"/>
               <a:pPr/>
-              <a:t>5/12/2026</a:t>
+              <a:t>5/14/2026</a:t>
             </a:fld>
             <a:endParaRPr lang="en-US"/>
           </a:p>
@@ -3661,7 +3649,7 @@
             <a:fld id="{B61BEF0D-F0BB-DE4B-95CE-6DB70DBA9567}" type="datetimeFigureOut">
               <a:rPr lang="en-US" dirty="0"/>
               <a:pPr/>
-              <a:t>5/12/2026</a:t>
+              <a:t>5/14/2026</a:t>
             </a:fld>
             <a:endParaRPr lang="en-US"/>
           </a:p>
@@ -3957,7 +3945,7 @@
             <a:fld id="{B61BEF0D-F0BB-DE4B-95CE-6DB70DBA9567}" type="datetimeFigureOut">
               <a:rPr lang="en-US" dirty="0"/>
               <a:pPr/>
-              <a:t>5/12/2026</a:t>
+              <a:t>5/14/2026</a:t>
             </a:fld>
             <a:endParaRPr lang="en-US"/>
           </a:p>
@@ -4398,7 +4386,7 @@
             <a:fld id="{B61BEF0D-F0BB-DE4B-95CE-6DB70DBA9567}" type="datetimeFigureOut">
               <a:rPr lang="en-US" dirty="0"/>
               <a:pPr/>
-              <a:t>5/12/2026</a:t>
+              <a:t>5/14/2026</a:t>
             </a:fld>
             <a:endParaRPr lang="en-US"/>
           </a:p>
@@ -4517,7 +4505,7 @@
             <a:fld id="{B61BEF0D-F0BB-DE4B-95CE-6DB70DBA9567}" type="datetimeFigureOut">
               <a:rPr lang="en-US" dirty="0"/>
               <a:pPr/>
-              <a:t>5/12/2026</a:t>
+              <a:t>5/14/2026</a:t>
             </a:fld>
             <a:endParaRPr lang="en-US"/>
           </a:p>
@@ -4614,7 +4602,7 @@
             <a:fld id="{B61BEF0D-F0BB-DE4B-95CE-6DB70DBA9567}" type="datetimeFigureOut">
               <a:rPr lang="en-US" dirty="0"/>
               <a:pPr/>
-              <a:t>5/12/2026</a:t>
+              <a:t>5/14/2026</a:t>
             </a:fld>
             <a:endParaRPr lang="en-US"/>
           </a:p>
@@ -4897,7 +4885,7 @@
             <a:fld id="{B61BEF0D-F0BB-DE4B-95CE-6DB70DBA9567}" type="datetimeFigureOut">
               <a:rPr lang="en-US" dirty="0"/>
               <a:pPr/>
-              <a:t>5/12/2026</a:t>
+              <a:t>5/14/2026</a:t>
             </a:fld>
             <a:endParaRPr lang="en-US"/>
           </a:p>
@@ -5185,7 +5173,7 @@
             <a:fld id="{B61BEF0D-F0BB-DE4B-95CE-6DB70DBA9567}" type="datetimeFigureOut">
               <a:rPr lang="en-US" dirty="0"/>
               <a:pPr/>
-              <a:t>5/12/2026</a:t>
+              <a:t>5/14/2026</a:t>
             </a:fld>
             <a:endParaRPr lang="en-US"/>
           </a:p>
@@ -5715,7 +5703,7 @@
             <a:fld id="{B61BEF0D-F0BB-DE4B-95CE-6DB70DBA9567}" type="datetimeFigureOut">
               <a:rPr lang="en-US" dirty="0"/>
               <a:pPr/>
-              <a:t>5/12/2026</a:t>
+              <a:t>5/14/2026</a:t>
             </a:fld>
             <a:endParaRPr lang="en-US"/>
           </a:p>
@@ -6277,6 +6265,11 @@
               </a:rPr>
               <a:t>INFORMATION  TECHNOLOGY</a:t>
             </a:r>
+            <a:endParaRPr lang="en-GB" sz="5400" dirty="0">
+              <a:solidFill>
+                <a:srgbClr val="0070C0"/>
+              </a:solidFill>
+            </a:endParaRPr>
           </a:p>
         </p:txBody>
       </p:sp>
@@ -6296,8 +6289,55 @@
           <a:lstStyle/>
           <a:p>
             <a:r>
-              <a:rPr lang="en-GB"/>
+              <a:rPr lang="en-GB" dirty="0"/>
               <a:t>  </a:t>
+            </a:r>
+          </a:p>
+        </p:txBody>
+      </p:sp>
+      <p:sp>
+        <p:nvSpPr>
+          <p:cNvPr id="5" name="TextBox 4">
+            <a:extLst>
+              <a:ext uri="{FF2B5EF4-FFF2-40B4-BE49-F238E27FC236}">
+                <a16:creationId xmlns:a16="http://schemas.microsoft.com/office/drawing/2014/main" id="{E36FFD95-3781-85C0-DF44-9E33D3316B36}"/>
+              </a:ext>
+            </a:extLst>
+          </p:cNvPr>
+          <p:cNvSpPr txBox="1"/>
+          <p:nvPr/>
+        </p:nvSpPr>
+        <p:spPr>
+          <a:xfrm>
+            <a:off x="7869837" y="3165281"/>
+            <a:ext cx="2938072" cy="646331"/>
+          </a:xfrm>
+          <a:prstGeom prst="rect">
+            <a:avLst/>
+          </a:prstGeom>
+          <a:noFill/>
+        </p:spPr>
+        <p:txBody>
+          <a:bodyPr wrap="square">
+            <a:spAutoFit/>
+          </a:bodyPr>
+          <a:lstStyle/>
+          <a:p>
+            <a:r>
+              <a:rPr lang="en-US" sz="3600" dirty="0">
+                <a:solidFill>
+                  <a:srgbClr val="002060"/>
+                </a:solidFill>
+              </a:rPr>
+              <a:t>-</a:t>
+            </a:r>
+            <a:r>
+              <a:rPr lang="en-US" sz="2800" dirty="0">
+                <a:solidFill>
+                  <a:srgbClr val="002060"/>
+                </a:solidFill>
+              </a:rPr>
+              <a:t> RITTIKA  GHOSH</a:t>
             </a:r>
           </a:p>
         </p:txBody>
@@ -10262,7 +10302,7 @@
           <a:bodyPr/>
           <a:lstStyle/>
           <a:p>
-            <a:endParaRPr lang="en-GB"/>
+            <a:endParaRPr lang="en-GB" dirty="0"/>
           </a:p>
         </p:txBody>
       </p:sp>
